--- a/relatorios/diterra-agosto-2026/Di Terra - Relatorio de Midia - Agosto 2026.pptx
+++ b/relatorios/diterra-agosto-2026/Di Terra - Relatorio de Midia - Agosto 2026.pptx
@@ -178,7 +178,7 @@
           </c:spPr>
           <c:invertIfNegative val="0"/>
           <c:dLbls>
-            <c:numFmt formatCode="#,##0" sourceLinked="0"/>
+            <c:numFmt formatCode="[$-416]#,##0" sourceLinked="0"/>
             <c:txPr>
               <a:bodyPr/>
               <a:lstStyle/>
@@ -202,23 +202,21 @@
             <c:showLeaderLines val="0"/>
           </c:dLbls>
           <c:cat>
-            <c:multiLvlStrRef>
+            <c:strRef>
               <c:f>Sheet1!$A$2:$A$4</c:f>
-              <c:multiLvlStrCache>
+              <c:strCache>
                 <c:ptCount val="3"/>
-                <c:lvl>
-                  <c:pt idx="0">
-                    <c:v>Meta Ads</c:v>
-                  </c:pt>
-                  <c:pt idx="1">
-                    <c:v>Google Ads</c:v>
-                  </c:pt>
-                  <c:pt idx="2">
-                    <c:v>Total</c:v>
-                  </c:pt>
-                </c:lvl>
-              </c:multiLvlStrCache>
-            </c:multiLvlStrRef>
+                <c:pt idx="0">
+                  <c:v>Meta Ads</c:v>
+                </c:pt>
+                <c:pt idx="1">
+                  <c:v>Google Ads</c:v>
+                </c:pt>
+                <c:pt idx="2">
+                  <c:v>Total</c:v>
+                </c:pt>
+              </c:strCache>
+            </c:strRef>
           </c:cat>
           <c:val>
             <c:numRef>
@@ -261,7 +259,7 @@
           </c:spPr>
           <c:invertIfNegative val="0"/>
           <c:dLbls>
-            <c:numFmt formatCode="#,##0" sourceLinked="0"/>
+            <c:numFmt formatCode="[$-416]#,##0" sourceLinked="0"/>
             <c:txPr>
               <a:bodyPr/>
               <a:lstStyle/>
@@ -285,23 +283,21 @@
             <c:showLeaderLines val="0"/>
           </c:dLbls>
           <c:cat>
-            <c:multiLvlStrRef>
+            <c:strRef>
               <c:f>Sheet1!$A$2:$A$4</c:f>
-              <c:multiLvlStrCache>
+              <c:strCache>
                 <c:ptCount val="3"/>
-                <c:lvl>
-                  <c:pt idx="0">
-                    <c:v>Meta Ads</c:v>
-                  </c:pt>
-                  <c:pt idx="1">
-                    <c:v>Google Ads</c:v>
-                  </c:pt>
-                  <c:pt idx="2">
-                    <c:v>Total</c:v>
-                  </c:pt>
-                </c:lvl>
-              </c:multiLvlStrCache>
-            </c:multiLvlStrRef>
+                <c:pt idx="0">
+                  <c:v>Meta Ads</c:v>
+                </c:pt>
+                <c:pt idx="1">
+                  <c:v>Google Ads</c:v>
+                </c:pt>
+                <c:pt idx="2">
+                  <c:v>Total</c:v>
+                </c:pt>
+              </c:strCache>
+            </c:strRef>
           </c:cat>
           <c:val>
             <c:numRef>
@@ -323,7 +319,7 @@
           </c:val>
         </c:ser>
         <c:dLbls>
-          <c:numFmt formatCode="#,##0" sourceLinked="0"/>
+          <c:numFmt formatCode="[$-416]#,##0" sourceLinked="0"/>
           <c:txPr>
             <a:bodyPr/>
             <a:lstStyle/>
@@ -398,6 +394,7 @@
         <c:scaling>
           <c:orientation val="minMax"/>
           <c:max val="1750"/>
+          <c:min val="0"/>
         </c:scaling>
         <c:delete val="0"/>
         <c:axPos val="l"/>
@@ -555,7 +552,7 @@
           </c:spPr>
           <c:invertIfNegative val="0"/>
           <c:dLbls>
-            <c:numFmt formatCode="#,##0" sourceLinked="0"/>
+            <c:numFmt formatCode="[$-416]#,##0.00" sourceLinked="0"/>
             <c:txPr>
               <a:bodyPr/>
               <a:lstStyle/>
@@ -579,23 +576,21 @@
             <c:showLeaderLines val="0"/>
           </c:dLbls>
           <c:cat>
-            <c:multiLvlStrRef>
+            <c:strRef>
               <c:f>Sheet1!$A$2:$A$4</c:f>
-              <c:multiLvlStrCache>
+              <c:strCache>
                 <c:ptCount val="3"/>
-                <c:lvl>
-                  <c:pt idx="0">
-                    <c:v>Meta Ads</c:v>
-                  </c:pt>
-                  <c:pt idx="1">
-                    <c:v>Google Ads</c:v>
-                  </c:pt>
-                  <c:pt idx="2">
-                    <c:v>Total</c:v>
-                  </c:pt>
-                </c:lvl>
-              </c:multiLvlStrCache>
-            </c:multiLvlStrRef>
+                <c:pt idx="0">
+                  <c:v>Meta Ads</c:v>
+                </c:pt>
+                <c:pt idx="1">
+                  <c:v>Google Ads</c:v>
+                </c:pt>
+                <c:pt idx="2">
+                  <c:v>Total</c:v>
+                </c:pt>
+              </c:strCache>
+            </c:strRef>
           </c:cat>
           <c:val>
             <c:numRef>
@@ -638,7 +633,7 @@
           </c:spPr>
           <c:invertIfNegative val="0"/>
           <c:dLbls>
-            <c:numFmt formatCode="#,##0" sourceLinked="0"/>
+            <c:numFmt formatCode="[$-416]#,##0.00" sourceLinked="0"/>
             <c:txPr>
               <a:bodyPr/>
               <a:lstStyle/>
@@ -662,23 +657,21 @@
             <c:showLeaderLines val="0"/>
           </c:dLbls>
           <c:cat>
-            <c:multiLvlStrRef>
+            <c:strRef>
               <c:f>Sheet1!$A$2:$A$4</c:f>
-              <c:multiLvlStrCache>
+              <c:strCache>
                 <c:ptCount val="3"/>
-                <c:lvl>
-                  <c:pt idx="0">
-                    <c:v>Meta Ads</c:v>
-                  </c:pt>
-                  <c:pt idx="1">
-                    <c:v>Google Ads</c:v>
-                  </c:pt>
-                  <c:pt idx="2">
-                    <c:v>Total</c:v>
-                  </c:pt>
-                </c:lvl>
-              </c:multiLvlStrCache>
-            </c:multiLvlStrRef>
+                <c:pt idx="0">
+                  <c:v>Meta Ads</c:v>
+                </c:pt>
+                <c:pt idx="1">
+                  <c:v>Google Ads</c:v>
+                </c:pt>
+                <c:pt idx="2">
+                  <c:v>Total</c:v>
+                </c:pt>
+              </c:strCache>
+            </c:strRef>
           </c:cat>
           <c:val>
             <c:numRef>
@@ -700,7 +693,7 @@
           </c:val>
         </c:ser>
         <c:dLbls>
-          <c:numFmt formatCode="#,##0" sourceLinked="0"/>
+          <c:numFmt formatCode="[$-416]#,##0.00" sourceLinked="0"/>
           <c:txPr>
             <a:bodyPr/>
             <a:lstStyle/>
@@ -775,6 +768,7 @@
         <c:scaling>
           <c:orientation val="minMax"/>
           <c:max val="48"/>
+          <c:min val="0"/>
         </c:scaling>
         <c:delete val="0"/>
         <c:axPos val="l"/>
@@ -932,7 +926,7 @@
           </c:spPr>
           <c:invertIfNegative val="0"/>
           <c:dLbls>
-            <c:numFmt formatCode="#,##0" sourceLinked="0"/>
+            <c:numFmt formatCode="[$-416]#,##0" sourceLinked="0"/>
             <c:txPr>
               <a:bodyPr/>
               <a:lstStyle/>
@@ -956,23 +950,21 @@
             <c:showLeaderLines val="0"/>
           </c:dLbls>
           <c:cat>
-            <c:multiLvlStrRef>
+            <c:strRef>
               <c:f>Sheet1!$A$2:$A$4</c:f>
-              <c:multiLvlStrCache>
+              <c:strCache>
                 <c:ptCount val="3"/>
-                <c:lvl>
-                  <c:pt idx="0">
-                    <c:v>Formulário Meta (lead ads)</c:v>
-                  </c:pt>
-                  <c:pt idx="1">
-                    <c:v>Formulário no site (pixel)</c:v>
-                  </c:pt>
-                  <c:pt idx="2">
-                    <c:v>Conversas no WhatsApp</c:v>
-                  </c:pt>
-                </c:lvl>
-              </c:multiLvlStrCache>
-            </c:multiLvlStrRef>
+                <c:pt idx="0">
+                  <c:v>Formulário Meta (lead ads)</c:v>
+                </c:pt>
+                <c:pt idx="1">
+                  <c:v>Formulário no site (pixel)</c:v>
+                </c:pt>
+                <c:pt idx="2">
+                  <c:v>Conversas no WhatsApp</c:v>
+                </c:pt>
+              </c:strCache>
+            </c:strRef>
           </c:cat>
           <c:val>
             <c:numRef>
@@ -1015,7 +1007,7 @@
           </c:spPr>
           <c:invertIfNegative val="0"/>
           <c:dLbls>
-            <c:numFmt formatCode="#,##0" sourceLinked="0"/>
+            <c:numFmt formatCode="[$-416]#,##0" sourceLinked="0"/>
             <c:txPr>
               <a:bodyPr/>
               <a:lstStyle/>
@@ -1039,23 +1031,21 @@
             <c:showLeaderLines val="0"/>
           </c:dLbls>
           <c:cat>
-            <c:multiLvlStrRef>
+            <c:strRef>
               <c:f>Sheet1!$A$2:$A$4</c:f>
-              <c:multiLvlStrCache>
+              <c:strCache>
                 <c:ptCount val="3"/>
-                <c:lvl>
-                  <c:pt idx="0">
-                    <c:v>Formulário Meta (lead ads)</c:v>
-                  </c:pt>
-                  <c:pt idx="1">
-                    <c:v>Formulário no site (pixel)</c:v>
-                  </c:pt>
-                  <c:pt idx="2">
-                    <c:v>Conversas no WhatsApp</c:v>
-                  </c:pt>
-                </c:lvl>
-              </c:multiLvlStrCache>
-            </c:multiLvlStrRef>
+                <c:pt idx="0">
+                  <c:v>Formulário Meta (lead ads)</c:v>
+                </c:pt>
+                <c:pt idx="1">
+                  <c:v>Formulário no site (pixel)</c:v>
+                </c:pt>
+                <c:pt idx="2">
+                  <c:v>Conversas no WhatsApp</c:v>
+                </c:pt>
+              </c:strCache>
+            </c:strRef>
           </c:cat>
           <c:val>
             <c:numRef>
@@ -1077,7 +1067,7 @@
           </c:val>
         </c:ser>
         <c:dLbls>
-          <c:numFmt formatCode="#,##0" sourceLinked="0"/>
+          <c:numFmt formatCode="[$-416]#,##0" sourceLinked="0"/>
           <c:txPr>
             <a:bodyPr/>
             <a:lstStyle/>
@@ -1152,6 +1142,7 @@
         <c:scaling>
           <c:orientation val="minMax"/>
           <c:max val="850"/>
+          <c:min val="0"/>
         </c:scaling>
         <c:delete val="0"/>
         <c:axPos val="l"/>
@@ -1309,7 +1300,7 @@
           </c:spPr>
           <c:invertIfNegative val="0"/>
           <c:dLbls>
-            <c:numFmt formatCode="#,##0" sourceLinked="0"/>
+            <c:numFmt formatCode="[$-416]#,##0.00" sourceLinked="0"/>
             <c:txPr>
               <a:bodyPr/>
               <a:lstStyle/>
@@ -1333,38 +1324,36 @@
             <c:showLeaderLines val="0"/>
           </c:dLbls>
           <c:cat>
-            <c:multiLvlStrRef>
+            <c:strRef>
               <c:f>Sheet1!$A$2:$A$9</c:f>
-              <c:multiLvlStrCache>
+              <c:strCache>
                 <c:ptCount val="8"/>
-                <c:lvl>
-                  <c:pt idx="0">
-                    <c:v>Corporativo (PMax)</c:v>
-                  </c:pt>
-                  <c:pt idx="1">
-                    <c:v>Casamento (PMax)</c:v>
-                  </c:pt>
-                  <c:pt idx="2">
-                    <c:v>TERRÁ | INSTITUCIONAL</c:v>
-                  </c:pt>
-                  <c:pt idx="3">
-                    <c:v>QUERÊNCIA | CASAMENTO</c:v>
-                  </c:pt>
-                  <c:pt idx="4">
-                    <c:v>DEBUTANTES | TERRÁ</c:v>
-                  </c:pt>
-                  <c:pt idx="5">
-                    <c:v>BODAS | TERRÁ</c:v>
-                  </c:pt>
-                  <c:pt idx="6">
-                    <c:v>CASAMENTO | QUERÊNCIA | SP</c:v>
-                  </c:pt>
-                  <c:pt idx="7">
-                    <c:v>PALACETE MONTE ALEGRE</c:v>
-                  </c:pt>
-                </c:lvl>
-              </c:multiLvlStrCache>
-            </c:multiLvlStrRef>
+                <c:pt idx="0">
+                  <c:v>Corporativo (PMax)</c:v>
+                </c:pt>
+                <c:pt idx="1">
+                  <c:v>Casamento (PMax)</c:v>
+                </c:pt>
+                <c:pt idx="2">
+                  <c:v>TERRÁ | INSTITUCIONAL</c:v>
+                </c:pt>
+                <c:pt idx="3">
+                  <c:v>QUERÊNCIA | CASAMENTO</c:v>
+                </c:pt>
+                <c:pt idx="4">
+                  <c:v>DEBUTANTES | TERRÁ</c:v>
+                </c:pt>
+                <c:pt idx="5">
+                  <c:v>BODAS | TERRÁ</c:v>
+                </c:pt>
+                <c:pt idx="6">
+                  <c:v>CASAMENTO | QUERÊNCIA | SP</c:v>
+                </c:pt>
+                <c:pt idx="7">
+                  <c:v>PALACETE MONTE ALEGRE</c:v>
+                </c:pt>
+              </c:strCache>
+            </c:strRef>
           </c:cat>
           <c:val>
             <c:numRef>
@@ -1401,7 +1390,7 @@
           </c:val>
         </c:ser>
         <c:dLbls>
-          <c:numFmt formatCode="#,##0" sourceLinked="0"/>
+          <c:numFmt formatCode="[$-416]#,##0.00" sourceLinked="0"/>
           <c:txPr>
             <a:bodyPr/>
             <a:lstStyle/>
@@ -1476,6 +1465,7 @@
         <c:scaling>
           <c:orientation val="minMax"/>
           <c:max val="360"/>
+          <c:min val="0"/>
         </c:scaling>
         <c:delete val="0"/>
         <c:axPos val="b"/>

--- a/relatorios/diterra-agosto-2026/Di Terra - Relatorio de Midia - Agosto 2026.pptx
+++ b/relatorios/diterra-agosto-2026/Di Terra - Relatorio de Midia - Agosto 2026.pptx
@@ -178,7 +178,7 @@
           </c:spPr>
           <c:invertIfNegative val="0"/>
           <c:dLbls>
-            <c:numFmt formatCode="[$-416]#,##0" sourceLinked="0"/>
+            <c:numFmt formatCode="#,##0" sourceLinked="0"/>
             <c:txPr>
               <a:bodyPr/>
               <a:lstStyle/>
@@ -259,7 +259,7 @@
           </c:spPr>
           <c:invertIfNegative val="0"/>
           <c:dLbls>
-            <c:numFmt formatCode="[$-416]#,##0" sourceLinked="0"/>
+            <c:numFmt formatCode="#,##0" sourceLinked="0"/>
             <c:txPr>
               <a:bodyPr/>
               <a:lstStyle/>
@@ -319,7 +319,7 @@
           </c:val>
         </c:ser>
         <c:dLbls>
-          <c:numFmt formatCode="[$-416]#,##0" sourceLinked="0"/>
+          <c:numFmt formatCode="#,##0" sourceLinked="0"/>
           <c:txPr>
             <a:bodyPr/>
             <a:lstStyle/>
@@ -552,7 +552,7 @@
           </c:spPr>
           <c:invertIfNegative val="0"/>
           <c:dLbls>
-            <c:numFmt formatCode="[$-416]#,##0.00" sourceLinked="0"/>
+            <c:numFmt formatCode="#,##0.00" sourceLinked="0"/>
             <c:txPr>
               <a:bodyPr/>
               <a:lstStyle/>
@@ -633,7 +633,7 @@
           </c:spPr>
           <c:invertIfNegative val="0"/>
           <c:dLbls>
-            <c:numFmt formatCode="[$-416]#,##0.00" sourceLinked="0"/>
+            <c:numFmt formatCode="#,##0.00" sourceLinked="0"/>
             <c:txPr>
               <a:bodyPr/>
               <a:lstStyle/>
@@ -693,7 +693,7 @@
           </c:val>
         </c:ser>
         <c:dLbls>
-          <c:numFmt formatCode="[$-416]#,##0.00" sourceLinked="0"/>
+          <c:numFmt formatCode="#,##0.00" sourceLinked="0"/>
           <c:txPr>
             <a:bodyPr/>
             <a:lstStyle/>
@@ -926,7 +926,7 @@
           </c:spPr>
           <c:invertIfNegative val="0"/>
           <c:dLbls>
-            <c:numFmt formatCode="[$-416]#,##0" sourceLinked="0"/>
+            <c:numFmt formatCode="#,##0" sourceLinked="0"/>
             <c:txPr>
               <a:bodyPr/>
               <a:lstStyle/>
@@ -1007,7 +1007,7 @@
           </c:spPr>
           <c:invertIfNegative val="0"/>
           <c:dLbls>
-            <c:numFmt formatCode="[$-416]#,##0" sourceLinked="0"/>
+            <c:numFmt formatCode="#,##0" sourceLinked="0"/>
             <c:txPr>
               <a:bodyPr/>
               <a:lstStyle/>
@@ -1067,7 +1067,7 @@
           </c:val>
         </c:ser>
         <c:dLbls>
-          <c:numFmt formatCode="[$-416]#,##0" sourceLinked="0"/>
+          <c:numFmt formatCode="#,##0" sourceLinked="0"/>
           <c:txPr>
             <a:bodyPr/>
             <a:lstStyle/>
@@ -1300,7 +1300,7 @@
           </c:spPr>
           <c:invertIfNegative val="0"/>
           <c:dLbls>
-            <c:numFmt formatCode="[$-416]#,##0.00" sourceLinked="0"/>
+            <c:numFmt formatCode="#,##0.00" sourceLinked="0"/>
             <c:txPr>
               <a:bodyPr/>
               <a:lstStyle/>
@@ -1390,7 +1390,7 @@
           </c:val>
         </c:ser>
         <c:dLbls>
-          <c:numFmt formatCode="[$-416]#,##0.00" sourceLinked="0"/>
+          <c:numFmt formatCode="#,##0.00" sourceLinked="0"/>
           <c:txPr>
             <a:bodyPr/>
             <a:lstStyle/>
